--- a/decks/geog-tectonic-hazards/geog-tectonic-hazards_ch3_plate-boundaries.pptx
+++ b/decks/geog-tectonic-hazards/geog-tectonic-hazards_ch3_plate-boundaries.pptx
@@ -128,30 +128,30 @@
   <p:extLst>
     <p:ext uri="{521415D9-36F7-43E2-AB2F-B90AF26B5E84}">
       <p14:sectionLst xmlns:p14="http://schemas.microsoft.com/office/powerpoint/2010/main">
-        <p14:section name="Opening" id="{b43bfcab-2d03-cd98-ec83-02afa250ccea}">
+        <p14:section name="Opening" id="{174cc00c-f355-93a2-8ab1-32d74d74e92a}">
           <p14:sldIdLst>
             <p14:sldId id="256"/>
           </p14:sldIdLst>
         </p14:section>
-        <p14:section name="Gate" id="{0f740925-b209-1b40-6579-438d65fd236b}">
+        <p14:section name="Gate" id="{3a81c8ad-0fb4-2d8f-497e-c6f12e217cff}">
           <p14:sldIdLst>
             <p14:sldId id="257"/>
             <p14:sldId id="258"/>
           </p14:sldIdLst>
         </p14:section>
-        <p14:section name="Pre-teach" id="{70d227ba-1617-f95a-1e69-0ad2990dfa72}">
+        <p14:section name="Pre-teach" id="{3819142d-ece9-59e7-ba72-7b0709a74297}">
           <p14:sldIdLst>
             <p14:sldId id="259"/>
             <p14:sldId id="260"/>
           </p14:sldIdLst>
         </p14:section>
-        <p14:section name="Read-along" id="{8dedf880-9c27-f0d1-e0b8-ee4123c546c9}">
+        <p14:section name="Read-along" id="{580e8bb6-6f88-db97-9099-705567612380}">
           <p14:sldIdLst>
             <p14:sldId id="261"/>
             <p14:sldId id="262"/>
           </p14:sldIdLst>
         </p14:section>
-        <p14:section name="Teach" id="{aa63a70e-de11-19e2-843b-81990ba0331f}">
+        <p14:section name="Teach" id="{118ec214-f415-157d-fd60-2af8f6880ec5}">
           <p14:sldIdLst>
             <p14:sldId id="263"/>
             <p14:sldId id="264"/>
@@ -162,7 +162,7 @@
             <p14:sldId id="269"/>
           </p14:sldIdLst>
         </p14:section>
-        <p14:section name="Routes" id="{d4a8f21b-8d0f-8bea-dc0d-fb4e0872cc89}">
+        <p14:section name="Routes" id="{ee702aaf-ef23-f231-ebe2-e8b10df4492e}">
           <p14:sldIdLst>
             <p14:sldId id="270"/>
             <p14:sldId id="271"/>
@@ -170,12 +170,12 @@
             <p14:sldId id="273"/>
           </p14:sldIdLst>
         </p14:section>
-        <p14:section name="Close" id="{4e3256fa-19f1-0c62-6022-1d804dafb2cf}">
+        <p14:section name="Close" id="{9bdff8d3-9951-56e6-759e-c855a03aba8c}">
           <p14:sldIdLst>
             <p14:sldId id="274"/>
           </p14:sldIdLst>
         </p14:section>
-        <p14:section name="Answers" id="{7ec292f2-eda5-924b-c9fa-2f6ed837df2c}">
+        <p14:section name="Answers" id="{e98a08b8-f009-1590-430d-23d2ddc8e99e}">
           <p14:sldIdLst>
             <p14:sldId id="275"/>
             <p14:sldId id="276"/>
@@ -1333,7 +1333,7 @@
 Support — work through the steps with the group: (1) Add the three magnitudes: 9 + 8.8 + 9.3. (2) 9 + 8.8 = 17.8, then 17.8 + 9.3 = 27.1. (3) Divide by the number of earthquakes, 3: 27.1 ÷ 3 = 9.033… (4) Round to 2 decimal places: 9.03.
 Parallel worked example for Support (model it, do not give the task answer): Three earthquakes measured 6.2, 7 and 5.7. What is their mean magnitude, to 1 decimal place? Add: 6.2 + 7 + 5.7 = 18.9.; Divide by 3: 18.9 ÷ 3 = 6.3.. Answer: 6.3.
 Core — reveal the hint only on request: Mean = total ÷ how many. Three earthquakes, so divide the total by 3.
-Stretch — no help; when finished: The deck says higher magnitudes are associated with destructive margins. Use the table to argue whether three earthquakes are enough to prove a correlation.</a:t>
+Stretch — no help; when finished: Your lesson says higher magnitudes are associated with destructive margins. Use the table to argue whether three earthquakes are enough to prove a correlation.</a:t>
             </a:r>
             <a:endParaRPr lang="en-US" dirty="0"/>
           </a:p>
@@ -1427,7 +1427,7 @@
 Support — work through the steps with the group: (1) Add the three magnitudes: 9 + 8.8 + 9.3. (2) 9 + 8.8 = 17.8, then 17.8 + 9.3 = 27.1. (3) Divide by the number of earthquakes, 3: 27.1 ÷ 3 = 9.033… (4) Round to 2 decimal places: 9.03.
 Parallel worked example for Support (model it, do not give the task answer): Three earthquakes measured 6.2, 7 and 5.7. What is their mean magnitude, to 1 decimal place? Add: 6.2 + 7 + 5.7 = 18.9.; Divide by 3: 18.9 ÷ 3 = 6.3.. Answer: 6.3.
 Core — reveal the hint only on request: Mean = total ÷ how many. Three earthquakes, so divide the total by 3.
-Stretch — no help; when finished: The deck says higher magnitudes are associated with destructive margins. Use the table to argue whether three earthquakes are enough to prove a correlation.</a:t>
+Stretch — no help; when finished: Your lesson says higher magnitudes are associated with destructive margins. Use the table to argue whether three earthquakes are enough to prove a correlation.</a:t>
             </a:r>
             <a:endParaRPr lang="en-US" dirty="0"/>
           </a:p>
@@ -2447,7 +2447,7 @@
             <a:r>
               <a:rPr lang="en-US" dirty="0"/>
               <a:t>Teach — Constructive boundaries: plates moving apart. Say it in your own words, then check understanding with a quick question: ask a pupil from the pre-teach group first, since they met these words and ideas before the lesson. Pupils try to recall before you re-explain.
-At a constructive boundary (your deck also calls it a divergent boundary) two plates move away from each other, pulled apart by convection currents in the mantle. As they separate, magma rises out of the mantle and fills the gap. It cools to create new crust, so the boundary constructs new rock. Where the magma reaches the surface there are volcanic eruptions, usually gentle ones, and the small movements of the separating plates cause earthquakes, but these are generally very small.
+At a constructive boundary (you may also see it called a divergent boundary) two plates move away from each other, pulled apart by convection currents in the mantle. As they separate, magma rises out of the mantle and fills the gap. It cools to create new crust, so the boundary constructs new rock. Where the magma reaches the surface there are volcanic eruptions, usually gentle ones, and the small movements of the separating plates cause earthquakes, but these are generally very small.
 Most constructive boundaries are between two oceanic plates, and the new crust builds an ocean ridge along the line of the boundary. The example to learn is the Mid-Atlantic Ridge, which runs the whole length of the Atlantic Ocean between the Eurasian and North American plates and rises above the sea in Iceland. Iceland is literally being made wider by this boundary.
 In your progress check you were asked to explain the physical processes at a constructive margin for four marks. The chain is: plates move apart, magma rises into the gap, it cools to form new crust and volcanoes, and the ridge grows.
 Tip: Constructive constructs. New crust, ocean ridge, volcanoes, small earthquakes, Mid-Atlantic Ridge and Iceland.</a:t>
@@ -10896,7 +10896,7 @@
                 <a:ea typeface="Calibri" pitchFamily="34" charset="-122"/>
                 <a:cs typeface="Calibri" pitchFamily="34" charset="-120"/>
               </a:rPr>
-              <a:t>The deck says higher magnitudes are associated with destructive margins. Use the table to argue whether three earthquakes are enough to prove a correlation.</a:t>
+              <a:t>Your lesson says higher magnitudes are associated with destructive margins. Use the table to argue whether three earthquakes are enough to prove a correlation.</a:t>
             </a:r>
             <a:endParaRPr lang="en-US" sz="1800" dirty="0"/>
           </a:p>
@@ -18393,7 +18393,7 @@
                 <a:ea typeface="Calibri" pitchFamily="34" charset="-122"/>
                 <a:cs typeface="Calibri" pitchFamily="34" charset="-120"/>
               </a:rPr>
-              <a:t>At a constructive boundary (your deck also calls it a divergent boundary) two plates move away from each other, pulled apart by convection currents in the mantle.</a:t>
+              <a:t>At a constructive boundary (you may also see it called a divergent boundary) two plates move away from each other, pulled apart by convection currents in the mantle.</a:t>
             </a:r>
             <a:endParaRPr lang="en-US" sz="2000" dirty="0"/>
           </a:p>
